--- a/Präsentation1.pptx
+++ b/Präsentation1.pptx
@@ -107,6 +107,11 @@
       </a:defRPr>
     </a:lvl9pPr>
   </p:defaultTextStyle>
+  <p:extLst>
+    <p:ext uri="{EFAFB233-063F-42B5-8137-9DF3F51BA10A}">
+      <p15:sldGuideLst xmlns:p15="http://schemas.microsoft.com/office/powerpoint/2012/main"/>
+    </p:ext>
+  </p:extLst>
 </p:presentation>
 </file>
 
@@ -257,7 +262,7 @@
           <a:p>
             <a:fld id="{69C8B58B-B543-554E-A6DD-A50EF054ACD9}" type="datetimeFigureOut">
               <a:rPr lang="de-DE" smtClean="0"/>
-              <a:t>08.04.26</a:t>
+              <a:t>10.04.2026</a:t>
             </a:fld>
             <a:endParaRPr lang="de-DE"/>
           </a:p>
@@ -455,7 +460,7 @@
           <a:p>
             <a:fld id="{69C8B58B-B543-554E-A6DD-A50EF054ACD9}" type="datetimeFigureOut">
               <a:rPr lang="de-DE" smtClean="0"/>
-              <a:t>08.04.26</a:t>
+              <a:t>10.04.2026</a:t>
             </a:fld>
             <a:endParaRPr lang="de-DE"/>
           </a:p>
@@ -663,7 +668,7 @@
           <a:p>
             <a:fld id="{69C8B58B-B543-554E-A6DD-A50EF054ACD9}" type="datetimeFigureOut">
               <a:rPr lang="de-DE" smtClean="0"/>
-              <a:t>08.04.26</a:t>
+              <a:t>10.04.2026</a:t>
             </a:fld>
             <a:endParaRPr lang="de-DE"/>
           </a:p>
@@ -861,7 +866,7 @@
           <a:p>
             <a:fld id="{69C8B58B-B543-554E-A6DD-A50EF054ACD9}" type="datetimeFigureOut">
               <a:rPr lang="de-DE" smtClean="0"/>
-              <a:t>08.04.26</a:t>
+              <a:t>10.04.2026</a:t>
             </a:fld>
             <a:endParaRPr lang="de-DE"/>
           </a:p>
@@ -1136,7 +1141,7 @@
           <a:p>
             <a:fld id="{69C8B58B-B543-554E-A6DD-A50EF054ACD9}" type="datetimeFigureOut">
               <a:rPr lang="de-DE" smtClean="0"/>
-              <a:t>08.04.26</a:t>
+              <a:t>10.04.2026</a:t>
             </a:fld>
             <a:endParaRPr lang="de-DE"/>
           </a:p>
@@ -1401,7 +1406,7 @@
           <a:p>
             <a:fld id="{69C8B58B-B543-554E-A6DD-A50EF054ACD9}" type="datetimeFigureOut">
               <a:rPr lang="de-DE" smtClean="0"/>
-              <a:t>08.04.26</a:t>
+              <a:t>10.04.2026</a:t>
             </a:fld>
             <a:endParaRPr lang="de-DE"/>
           </a:p>
@@ -1813,7 +1818,7 @@
           <a:p>
             <a:fld id="{69C8B58B-B543-554E-A6DD-A50EF054ACD9}" type="datetimeFigureOut">
               <a:rPr lang="de-DE" smtClean="0"/>
-              <a:t>08.04.26</a:t>
+              <a:t>10.04.2026</a:t>
             </a:fld>
             <a:endParaRPr lang="de-DE"/>
           </a:p>
@@ -1954,7 +1959,7 @@
           <a:p>
             <a:fld id="{69C8B58B-B543-554E-A6DD-A50EF054ACD9}" type="datetimeFigureOut">
               <a:rPr lang="de-DE" smtClean="0"/>
-              <a:t>08.04.26</a:t>
+              <a:t>10.04.2026</a:t>
             </a:fld>
             <a:endParaRPr lang="de-DE"/>
           </a:p>
@@ -2067,7 +2072,7 @@
           <a:p>
             <a:fld id="{69C8B58B-B543-554E-A6DD-A50EF054ACD9}" type="datetimeFigureOut">
               <a:rPr lang="de-DE" smtClean="0"/>
-              <a:t>08.04.26</a:t>
+              <a:t>10.04.2026</a:t>
             </a:fld>
             <a:endParaRPr lang="de-DE"/>
           </a:p>
@@ -2378,7 +2383,7 @@
           <a:p>
             <a:fld id="{69C8B58B-B543-554E-A6DD-A50EF054ACD9}" type="datetimeFigureOut">
               <a:rPr lang="de-DE" smtClean="0"/>
-              <a:t>08.04.26</a:t>
+              <a:t>10.04.2026</a:t>
             </a:fld>
             <a:endParaRPr lang="de-DE"/>
           </a:p>
@@ -2666,7 +2671,7 @@
           <a:p>
             <a:fld id="{69C8B58B-B543-554E-A6DD-A50EF054ACD9}" type="datetimeFigureOut">
               <a:rPr lang="de-DE" smtClean="0"/>
-              <a:t>08.04.26</a:t>
+              <a:t>10.04.2026</a:t>
             </a:fld>
             <a:endParaRPr lang="de-DE"/>
           </a:p>
@@ -2907,7 +2912,7 @@
           <a:p>
             <a:fld id="{69C8B58B-B543-554E-A6DD-A50EF054ACD9}" type="datetimeFigureOut">
               <a:rPr lang="de-DE" smtClean="0"/>
-              <a:t>08.04.26</a:t>
+              <a:t>10.04.2026</a:t>
             </a:fld>
             <a:endParaRPr lang="de-DE"/>
           </a:p>
@@ -4462,6 +4467,306 @@
           <a:chExt cx="0" cy="0"/>
         </a:xfrm>
       </p:grpSpPr>
+      <p:grpSp>
+        <p:nvGrpSpPr>
+          <p:cNvPr id="12" name="Gruppieren 11">
+            <a:extLst>
+              <a:ext uri="{FF2B5EF4-FFF2-40B4-BE49-F238E27FC236}">
+                <a16:creationId xmlns:a16="http://schemas.microsoft.com/office/drawing/2014/main" id="{D08621D5-CDE0-D010-029D-E2E272EB1DF8}"/>
+              </a:ext>
+            </a:extLst>
+          </p:cNvPr>
+          <p:cNvGrpSpPr/>
+          <p:nvPr/>
+        </p:nvGrpSpPr>
+        <p:grpSpPr>
+          <a:xfrm>
+            <a:off x="1199327" y="968673"/>
+            <a:ext cx="2953574" cy="4920654"/>
+            <a:chOff x="1199327" y="968673"/>
+            <a:chExt cx="2953574" cy="4920654"/>
+          </a:xfrm>
+        </p:grpSpPr>
+        <p:pic>
+          <p:nvPicPr>
+            <p:cNvPr id="5" name="Grafik 4">
+              <a:extLst>
+                <a:ext uri="{FF2B5EF4-FFF2-40B4-BE49-F238E27FC236}">
+                  <a16:creationId xmlns:a16="http://schemas.microsoft.com/office/drawing/2014/main" id="{E9CB9C68-E207-F0FA-D0C0-3E17D0502C5A}"/>
+                </a:ext>
+              </a:extLst>
+            </p:cNvPr>
+            <p:cNvPicPr>
+              <a:picLocks noChangeAspect="1"/>
+            </p:cNvPicPr>
+            <p:nvPr/>
+          </p:nvPicPr>
+          <p:blipFill>
+            <a:blip r:embed="rId2"/>
+            <a:stretch>
+              <a:fillRect/>
+            </a:stretch>
+          </p:blipFill>
+          <p:spPr>
+            <a:xfrm>
+              <a:off x="1199327" y="968673"/>
+              <a:ext cx="2953574" cy="4920654"/>
+            </a:xfrm>
+            <a:prstGeom prst="rect">
+              <a:avLst/>
+            </a:prstGeom>
+          </p:spPr>
+        </p:pic>
+        <p:sp>
+          <p:nvSpPr>
+            <p:cNvPr id="7" name="Rechteck 6">
+              <a:extLst>
+                <a:ext uri="{FF2B5EF4-FFF2-40B4-BE49-F238E27FC236}">
+                  <a16:creationId xmlns:a16="http://schemas.microsoft.com/office/drawing/2014/main" id="{E3BAD61A-EBB4-4395-E4E7-AA34B7574BD1}"/>
+                </a:ext>
+              </a:extLst>
+            </p:cNvPr>
+            <p:cNvSpPr/>
+            <p:nvPr/>
+          </p:nvSpPr>
+          <p:spPr>
+            <a:xfrm>
+              <a:off x="1199327" y="968673"/>
+              <a:ext cx="2953574" cy="4920654"/>
+            </a:xfrm>
+            <a:prstGeom prst="rect">
+              <a:avLst/>
+            </a:prstGeom>
+            <a:solidFill>
+              <a:schemeClr val="bg1">
+                <a:alpha val="78000"/>
+              </a:schemeClr>
+            </a:solidFill>
+            <a:ln>
+              <a:noFill/>
+            </a:ln>
+          </p:spPr>
+          <p:style>
+            <a:lnRef idx="2">
+              <a:schemeClr val="accent1">
+                <a:shade val="15000"/>
+              </a:schemeClr>
+            </a:lnRef>
+            <a:fillRef idx="1">
+              <a:schemeClr val="accent1"/>
+            </a:fillRef>
+            <a:effectRef idx="0">
+              <a:schemeClr val="accent1"/>
+            </a:effectRef>
+            <a:fontRef idx="minor">
+              <a:schemeClr val="lt1"/>
+            </a:fontRef>
+          </p:style>
+          <p:txBody>
+            <a:bodyPr rtlCol="0" anchor="ctr"/>
+            <a:lstStyle/>
+            <a:p>
+              <a:pPr algn="ctr"/>
+              <a:endParaRPr lang="en-US"/>
+            </a:p>
+          </p:txBody>
+        </p:sp>
+        <p:pic>
+          <p:nvPicPr>
+            <p:cNvPr id="6" name="Grafik 5">
+              <a:extLst>
+                <a:ext uri="{FF2B5EF4-FFF2-40B4-BE49-F238E27FC236}">
+                  <a16:creationId xmlns:a16="http://schemas.microsoft.com/office/drawing/2014/main" id="{2FF42772-3DD1-AA98-7986-422EB6135F97}"/>
+                </a:ext>
+              </a:extLst>
+            </p:cNvPr>
+            <p:cNvPicPr>
+              <a:picLocks noChangeAspect="1"/>
+            </p:cNvPicPr>
+            <p:nvPr/>
+          </p:nvPicPr>
+          <p:blipFill>
+            <a:blip r:embed="rId2"/>
+            <a:srcRect t="48645" b="45548"/>
+            <a:stretch>
+              <a:fillRect/>
+            </a:stretch>
+          </p:blipFill>
+          <p:spPr>
+            <a:xfrm>
+              <a:off x="1199327" y="3371850"/>
+              <a:ext cx="2953574" cy="285750"/>
+            </a:xfrm>
+            <a:prstGeom prst="rect">
+              <a:avLst/>
+            </a:prstGeom>
+          </p:spPr>
+        </p:pic>
+        <p:sp>
+          <p:nvSpPr>
+            <p:cNvPr id="8" name="Textfeld 7">
+              <a:extLst>
+                <a:ext uri="{FF2B5EF4-FFF2-40B4-BE49-F238E27FC236}">
+                  <a16:creationId xmlns:a16="http://schemas.microsoft.com/office/drawing/2014/main" id="{502655E2-72F8-4674-9BF5-1BC337B84E34}"/>
+                </a:ext>
+              </a:extLst>
+            </p:cNvPr>
+            <p:cNvSpPr txBox="1"/>
+            <p:nvPr/>
+          </p:nvSpPr>
+          <p:spPr>
+            <a:xfrm>
+              <a:off x="1903228" y="3059668"/>
+              <a:ext cx="431528" cy="369332"/>
+            </a:xfrm>
+            <a:prstGeom prst="rect">
+              <a:avLst/>
+            </a:prstGeom>
+            <a:noFill/>
+          </p:spPr>
+          <p:txBody>
+            <a:bodyPr wrap="none" rtlCol="0">
+              <a:spAutoFit/>
+            </a:bodyPr>
+            <a:lstStyle/>
+            <a:p>
+              <a:r>
+                <a:rPr lang="en-US" dirty="0">
+                  <a:solidFill>
+                    <a:schemeClr val="bg2">
+                      <a:lumMod val="50000"/>
+                    </a:schemeClr>
+                  </a:solidFill>
+                </a:rPr>
+                <a:t>13</a:t>
+              </a:r>
+            </a:p>
+          </p:txBody>
+        </p:sp>
+        <p:sp>
+          <p:nvSpPr>
+            <p:cNvPr id="9" name="Textfeld 8">
+              <a:extLst>
+                <a:ext uri="{FF2B5EF4-FFF2-40B4-BE49-F238E27FC236}">
+                  <a16:creationId xmlns:a16="http://schemas.microsoft.com/office/drawing/2014/main" id="{32DFD2C4-23B6-F521-6707-4E1CA87A79C7}"/>
+                </a:ext>
+              </a:extLst>
+            </p:cNvPr>
+            <p:cNvSpPr txBox="1"/>
+            <p:nvPr/>
+          </p:nvSpPr>
+          <p:spPr>
+            <a:xfrm>
+              <a:off x="1903228" y="3600450"/>
+              <a:ext cx="431528" cy="369332"/>
+            </a:xfrm>
+            <a:prstGeom prst="rect">
+              <a:avLst/>
+            </a:prstGeom>
+            <a:noFill/>
+          </p:spPr>
+          <p:txBody>
+            <a:bodyPr wrap="none" rtlCol="0">
+              <a:spAutoFit/>
+            </a:bodyPr>
+            <a:lstStyle/>
+            <a:p>
+              <a:r>
+                <a:rPr lang="en-US" dirty="0">
+                  <a:solidFill>
+                    <a:schemeClr val="bg2">
+                      <a:lumMod val="50000"/>
+                    </a:schemeClr>
+                  </a:solidFill>
+                </a:rPr>
+                <a:t>11</a:t>
+              </a:r>
+            </a:p>
+          </p:txBody>
+        </p:sp>
+        <p:sp>
+          <p:nvSpPr>
+            <p:cNvPr id="10" name="Textfeld 9">
+              <a:extLst>
+                <a:ext uri="{FF2B5EF4-FFF2-40B4-BE49-F238E27FC236}">
+                  <a16:creationId xmlns:a16="http://schemas.microsoft.com/office/drawing/2014/main" id="{80DCC214-439A-2DF9-73E2-4673E5F0A3F8}"/>
+                </a:ext>
+              </a:extLst>
+            </p:cNvPr>
+            <p:cNvSpPr txBox="1"/>
+            <p:nvPr/>
+          </p:nvSpPr>
+          <p:spPr>
+            <a:xfrm>
+              <a:off x="1903228" y="2792376"/>
+              <a:ext cx="431528" cy="369332"/>
+            </a:xfrm>
+            <a:prstGeom prst="rect">
+              <a:avLst/>
+            </a:prstGeom>
+            <a:noFill/>
+          </p:spPr>
+          <p:txBody>
+            <a:bodyPr wrap="none" rtlCol="0">
+              <a:spAutoFit/>
+            </a:bodyPr>
+            <a:lstStyle/>
+            <a:p>
+              <a:r>
+                <a:rPr lang="en-US" dirty="0">
+                  <a:solidFill>
+                    <a:schemeClr val="bg2">
+                      <a:lumMod val="50000"/>
+                    </a:schemeClr>
+                  </a:solidFill>
+                </a:rPr>
+                <a:t>14</a:t>
+              </a:r>
+            </a:p>
+          </p:txBody>
+        </p:sp>
+        <p:sp>
+          <p:nvSpPr>
+            <p:cNvPr id="11" name="Textfeld 10">
+              <a:extLst>
+                <a:ext uri="{FF2B5EF4-FFF2-40B4-BE49-F238E27FC236}">
+                  <a16:creationId xmlns:a16="http://schemas.microsoft.com/office/drawing/2014/main" id="{6EF6929A-5F1C-8EF3-12E8-BFE52BE06CBE}"/>
+                </a:ext>
+              </a:extLst>
+            </p:cNvPr>
+            <p:cNvSpPr txBox="1"/>
+            <p:nvPr/>
+          </p:nvSpPr>
+          <p:spPr>
+            <a:xfrm>
+              <a:off x="1903228" y="3834774"/>
+              <a:ext cx="431528" cy="369332"/>
+            </a:xfrm>
+            <a:prstGeom prst="rect">
+              <a:avLst/>
+            </a:prstGeom>
+            <a:noFill/>
+          </p:spPr>
+          <p:txBody>
+            <a:bodyPr wrap="none" rtlCol="0">
+              <a:spAutoFit/>
+            </a:bodyPr>
+            <a:lstStyle/>
+            <a:p>
+              <a:r>
+                <a:rPr lang="en-US" dirty="0">
+                  <a:solidFill>
+                    <a:schemeClr val="bg2">
+                      <a:lumMod val="50000"/>
+                    </a:schemeClr>
+                  </a:solidFill>
+                </a:rPr>
+                <a:t>10</a:t>
+              </a:r>
+            </a:p>
+          </p:txBody>
+        </p:sp>
+      </p:grpSp>
     </p:spTree>
     <p:extLst>
       <p:ext uri="{BB962C8B-B14F-4D97-AF65-F5344CB8AC3E}">
